--- a/resources/ppt_reu_PhenoMEn_19_11_2024.pptx
+++ b/resources/ppt_reu_PhenoMEn_19_11_2024.pptx
@@ -219,7 +219,7 @@
           <a:p>
             <a:fld id="{151C0664-3760-4B25-9F25-C7AAC42DAE60}" type="datetimeFigureOut">
               <a:rPr lang="en-US" smtClean="0"/>
-              <a:t>11/18/2024</a:t>
+              <a:t>11/19/2024</a:t>
             </a:fld>
             <a:endParaRPr lang="en-US"/>
           </a:p>
@@ -724,7 +724,7 @@
             </a:r>
             <a:r>
               <a:rPr lang="en-US" dirty="0" err="1"/>
-              <a:t>labellisé</a:t>
+              <a:t>labellisée</a:t>
             </a:r>
             <a:r>
               <a:rPr lang="en-US" dirty="0"/>
@@ -2454,7 +2454,7 @@
             </a:pPr>
             <a:r>
               <a:rPr lang="fr-FR" dirty="0"/>
-              <a:t>Pour l’interception de la lumière par exemple, on utilise </a:t>
+              <a:t>Pour l’interception de la lumière par exemple, on utilise le modèle de lumière </a:t>
             </a:r>
             <a:r>
               <a:rPr lang="fr-FR" dirty="0" err="1"/>
@@ -2462,7 +2462,15 @@
             </a:r>
             <a:r>
               <a:rPr lang="fr-FR" dirty="0"/>
-              <a:t> pour les scènes 3D. </a:t>
+              <a:t> pour les scènes 3D, qui est dans </a:t>
+            </a:r>
+            <a:r>
+              <a:rPr lang="fr-FR" dirty="0" err="1"/>
+              <a:t>OpenAlea</a:t>
+            </a:r>
+            <a:r>
+              <a:rPr lang="fr-FR" dirty="0"/>
+              <a:t>. </a:t>
             </a:r>
             <a:endParaRPr lang="en-US" dirty="0"/>
           </a:p>
@@ -3384,7 +3392,7 @@
           <a:p>
             <a:r>
               <a:rPr lang="fr-FR" dirty="0"/>
-              <a:t>Les modèles de culture sont définis à l’échelle de la parcelle (du m² ou de l’hectare), et reposent sur des hypothèses d’homogénéité en considérant une plante moyenne. </a:t>
+              <a:t>Les modèles de culture sont définis à l’échelle de la parcelle (du m² ou de l’hectare), et reposent sur des hypothèses d’homogénéité du couvert en considérant une plante moyenne. </a:t>
             </a:r>
           </a:p>
           <a:p>
@@ -3770,6 +3778,68 @@
             <a:r>
               <a:rPr lang="fr-FR" dirty="0"/>
               <a:t>Certains travaux se sont déjà attachés, processus par processus, à </a:t>
+            </a:r>
+          </a:p>
+          <a:p>
+            <a:endParaRPr lang="fr-FR" dirty="0"/>
+          </a:p>
+          <a:p>
+            <a:r>
+              <a:rPr lang="fr-FR" dirty="0"/>
+              <a:t>+ Zhu 2020 : </a:t>
+            </a:r>
+            <a:r>
+              <a:rPr lang="en-US" dirty="0"/>
+              <a:t>combine realistic 3-D plant architecture with a radiation model to quantify and evaluate the effect of differences in planting patterns (intercrops) and row orientations on canopy light interception </a:t>
+            </a:r>
+            <a:r>
+              <a:rPr lang="en-US" dirty="0">
+                <a:sym typeface="Wingdings" panose="05000000000000000000" pitchFamily="2" charset="2"/>
+              </a:rPr>
+              <a:t> through growth season but 3D reconstruction  can’t explore </a:t>
+            </a:r>
+            <a:r>
+              <a:rPr lang="en-US" dirty="0" err="1">
+                <a:sym typeface="Wingdings" panose="05000000000000000000" pitchFamily="2" charset="2"/>
+              </a:rPr>
+              <a:t>morphospace</a:t>
+            </a:r>
+            <a:endParaRPr lang="en-US" dirty="0">
+              <a:sym typeface="Wingdings" panose="05000000000000000000" pitchFamily="2" charset="2"/>
+            </a:endParaRPr>
+          </a:p>
+          <a:p>
+            <a:endParaRPr lang="en-US" dirty="0">
+              <a:sym typeface="Wingdings" panose="05000000000000000000" pitchFamily="2" charset="2"/>
+            </a:endParaRPr>
+          </a:p>
+          <a:p>
+            <a:r>
+              <a:rPr lang="en-US" dirty="0">
+                <a:sym typeface="Wingdings" panose="05000000000000000000" pitchFamily="2" charset="2"/>
+              </a:rPr>
+              <a:t>+ Yin 2021 : </a:t>
+            </a:r>
+            <a:r>
+              <a:rPr lang="en-US" dirty="0"/>
+              <a:t>On the needs for combining physiological principles and mathematics to improve crop models</a:t>
+            </a:r>
+          </a:p>
+          <a:p>
+            <a:endParaRPr lang="en-US" dirty="0"/>
+          </a:p>
+          <a:p>
+            <a:r>
+              <a:rPr lang="en-US" dirty="0"/>
+              <a:t>+ </a:t>
+            </a:r>
+            <a:r>
+              <a:rPr lang="en-US" dirty="0" err="1"/>
+              <a:t>Gaudio</a:t>
+            </a:r>
+            <a:r>
+              <a:rPr lang="en-US"/>
+              <a:t> 2019, 2022</a:t>
             </a:r>
             <a:endParaRPr lang="en-US" dirty="0"/>
           </a:p>
@@ -4149,7 +4219,7 @@
           <a:p>
             <a:fld id="{0C939681-64E9-4ED9-A4D7-2B0751918A9B}" type="datetime1">
               <a:rPr lang="fr-FR" smtClean="0"/>
-              <a:t>18/11/2024</a:t>
+              <a:t>19/11/2024</a:t>
             </a:fld>
             <a:endParaRPr lang="fr-FR"/>
           </a:p>
@@ -4317,7 +4387,7 @@
           <a:p>
             <a:fld id="{C188FBEE-F816-42FF-9376-FE7E35860987}" type="datetime1">
               <a:rPr lang="fr-FR" smtClean="0"/>
-              <a:t>18/11/2024</a:t>
+              <a:t>19/11/2024</a:t>
             </a:fld>
             <a:endParaRPr lang="fr-FR"/>
           </a:p>
@@ -4495,7 +4565,7 @@
           <a:p>
             <a:fld id="{174ABB49-665E-4EE2-8EBF-FE4A452697D3}" type="datetime1">
               <a:rPr lang="fr-FR" smtClean="0"/>
-              <a:t>18/11/2024</a:t>
+              <a:t>19/11/2024</a:t>
             </a:fld>
             <a:endParaRPr lang="fr-FR"/>
           </a:p>
@@ -4663,7 +4733,7 @@
           <a:p>
             <a:fld id="{8811C267-FB5B-4DB2-8120-94FB1295D495}" type="datetime1">
               <a:rPr lang="fr-FR" smtClean="0"/>
-              <a:t>18/11/2024</a:t>
+              <a:t>19/11/2024</a:t>
             </a:fld>
             <a:endParaRPr lang="fr-FR"/>
           </a:p>
@@ -4908,7 +4978,7 @@
           <a:p>
             <a:fld id="{8BEDAEE3-F550-4433-89BF-DB1C91B4E694}" type="datetime1">
               <a:rPr lang="fr-FR" smtClean="0"/>
-              <a:t>18/11/2024</a:t>
+              <a:t>19/11/2024</a:t>
             </a:fld>
             <a:endParaRPr lang="fr-FR"/>
           </a:p>
@@ -5137,7 +5207,7 @@
           <a:p>
             <a:fld id="{875EFE55-6C38-4F83-92CA-E17D1080EAD0}" type="datetime1">
               <a:rPr lang="fr-FR" smtClean="0"/>
-              <a:t>18/11/2024</a:t>
+              <a:t>19/11/2024</a:t>
             </a:fld>
             <a:endParaRPr lang="fr-FR"/>
           </a:p>
@@ -5501,7 +5571,7 @@
           <a:p>
             <a:fld id="{C24B4F1F-1D19-4EA3-900F-F158BF65E775}" type="datetime1">
               <a:rPr lang="fr-FR" smtClean="0"/>
-              <a:t>18/11/2024</a:t>
+              <a:t>19/11/2024</a:t>
             </a:fld>
             <a:endParaRPr lang="fr-FR"/>
           </a:p>
@@ -5618,7 +5688,7 @@
           <a:p>
             <a:fld id="{9347C87F-7D11-4D7B-B186-AEDF7BACC549}" type="datetime1">
               <a:rPr lang="fr-FR" smtClean="0"/>
-              <a:t>18/11/2024</a:t>
+              <a:t>19/11/2024</a:t>
             </a:fld>
             <a:endParaRPr lang="fr-FR"/>
           </a:p>
@@ -5713,7 +5783,7 @@
           <a:p>
             <a:fld id="{30B461FB-6D13-494D-89E1-4530981B7536}" type="datetime1">
               <a:rPr lang="fr-FR" smtClean="0"/>
-              <a:t>18/11/2024</a:t>
+              <a:t>19/11/2024</a:t>
             </a:fld>
             <a:endParaRPr lang="fr-FR"/>
           </a:p>
@@ -5988,7 +6058,7 @@
           <a:p>
             <a:fld id="{D2CEF9DF-4A39-43ED-BE68-EB63D76CFF37}" type="datetime1">
               <a:rPr lang="fr-FR" smtClean="0"/>
-              <a:t>18/11/2024</a:t>
+              <a:t>19/11/2024</a:t>
             </a:fld>
             <a:endParaRPr lang="fr-FR"/>
           </a:p>
@@ -6240,7 +6310,7 @@
           <a:p>
             <a:fld id="{12BA0CB7-2A57-4841-B602-02CB78CDF575}" type="datetime1">
               <a:rPr lang="fr-FR" smtClean="0"/>
-              <a:t>18/11/2024</a:t>
+              <a:t>19/11/2024</a:t>
             </a:fld>
             <a:endParaRPr lang="fr-FR"/>
           </a:p>
@@ -6451,7 +6521,7 @@
           <a:p>
             <a:fld id="{E72661C0-4019-4DF0-85FA-478C82BAF507}" type="datetime1">
               <a:rPr lang="fr-FR" smtClean="0"/>
-              <a:t>18/11/2024</a:t>
+              <a:t>19/11/2024</a:t>
             </a:fld>
             <a:endParaRPr lang="fr-FR"/>
           </a:p>
@@ -13014,8 +13084,8 @@
           </a:p>
         </p:txBody>
       </p:sp>
-      <mc:AlternateContent xmlns:mc="http://schemas.openxmlformats.org/markup-compatibility/2006">
-        <mc:Choice xmlns:a14="http://schemas.microsoft.com/office/drawing/2010/main" Requires="a14">
+      <mc:AlternateContent xmlns:mc="http://schemas.openxmlformats.org/markup-compatibility/2006" xmlns:a14="http://schemas.microsoft.com/office/drawing/2010/main">
+        <mc:Choice Requires="a14">
           <p:sp>
             <p:nvSpPr>
               <p:cNvPr id="25" name="TextBox 24">
@@ -13556,7 +13626,7 @@
             </p:txBody>
           </p:sp>
         </mc:Choice>
-        <mc:Fallback>
+        <mc:Fallback xmlns="">
           <p:sp>
             <p:nvSpPr>
               <p:cNvPr id="25" name="TextBox 24">
@@ -22870,7 +22940,7 @@
         <p:spPr>
           <a:xfrm>
             <a:off x="724080" y="1811462"/>
-            <a:ext cx="4728030" cy="4123257"/>
+            <a:ext cx="4903848" cy="4123257"/>
           </a:xfrm>
           <a:prstGeom prst="rect">
             <a:avLst/>
@@ -23061,7 +23131,7 @@
           <a:p>
             <a:r>
               <a:rPr lang="en-US" sz="2400" dirty="0"/>
-              <a:t>Leaf insertion angle: [10, 30, 50] </a:t>
+              <a:t>Leaf insertion angle (°): [10, 30, 50] </a:t>
             </a:r>
             <a:r>
               <a:rPr lang="en-US" sz="1600" dirty="0"/>
@@ -23071,7 +23141,7 @@
           <a:p>
             <a:r>
               <a:rPr lang="en-US" sz="2400" dirty="0"/>
-              <a:t>Leaf curvature: [45, 90, 135] </a:t>
+              <a:t>Leaf curvature (°): [45, 90, 135] </a:t>
             </a:r>
           </a:p>
           <a:p>
@@ -23085,7 +23155,7 @@
             </a:r>
             <a:r>
               <a:rPr lang="fr-FR" sz="2400" dirty="0"/>
-              <a:t>°</a:t>
+              <a:t>° (°)</a:t>
             </a:r>
             <a:r>
               <a:rPr lang="en-US" sz="2400" dirty="0"/>
@@ -23858,7 +23928,7 @@
             </a:pPr>
             <a:r>
               <a:rPr lang="en-US" dirty="0"/>
-              <a:t>Extension of the cereal model to legumes (chapter 1)</a:t>
+              <a:t>Extension of the cereal model to legumes (chapter 2)</a:t>
             </a:r>
           </a:p>
           <a:p>
@@ -26462,7 +26532,7 @@
             </a:pPr>
             <a:r>
               <a:rPr lang="en-US" sz="2000" dirty="0"/>
-              <a:t>homogeneous hypotheses </a:t>
+              <a:t>homogeneous hypotheses (average plant)</a:t>
             </a:r>
           </a:p>
           <a:p>
@@ -29883,6 +29953,15 @@
 </file>
 
 <file path=customXml/item1.xml><?xml version="1.0" encoding="utf-8"?>
+<?mso-contentType ?>
+<FormTemplates xmlns="http://schemas.microsoft.com/sharepoint/v3/contenttype/forms">
+  <Display>DocumentLibraryForm</Display>
+  <Edit>DocumentLibraryForm</Edit>
+  <New>DocumentLibraryForm</New>
+</FormTemplates>
+</file>
+
+<file path=customXml/item2.xml><?xml version="1.0" encoding="utf-8"?>
 <ct:contentTypeSchema xmlns:ct="http://schemas.microsoft.com/office/2006/metadata/contentType" xmlns:ma="http://schemas.microsoft.com/office/2006/metadata/properties/metaAttributes" ct:_="" ma:_="" ma:contentTypeName="Document" ma:contentTypeID="0x010100F6AAEAEC55338B4CBD1310BC20ECA43B" ma:contentTypeVersion="6" ma:contentTypeDescription="Crée un document." ma:contentTypeScope="" ma:versionID="f3bee9aad377d983e5ace40107548819">
   <xsd:schema xmlns:xsd="http://www.w3.org/2001/XMLSchema" xmlns:xs="http://www.w3.org/2001/XMLSchema" xmlns:p="http://schemas.microsoft.com/office/2006/metadata/properties" xmlns:ns2="5e11a331-0175-485c-b5bc-7baf3794bcc4" xmlns:ns3="6123b362-d884-4010-ad19-191a22b79bf5" targetNamespace="http://schemas.microsoft.com/office/2006/metadata/properties" ma:root="true" ma:fieldsID="da4ddf064b527fafbeea9bca5b83bae1" ns2:_="" ns3:_="">
     <xsd:import namespace="5e11a331-0175-485c-b5bc-7baf3794bcc4"/>
@@ -30059,16 +30138,15 @@
 </ct:contentTypeSchema>
 </file>
 
-<file path=customXml/item2.xml><?xml version="1.0" encoding="utf-8"?>
-<?mso-contentType ?>
-<FormTemplates xmlns="http://schemas.microsoft.com/sharepoint/v3/contenttype/forms">
-  <Display>DocumentLibraryForm</Display>
-  <Edit>DocumentLibraryForm</Edit>
-  <New>DocumentLibraryForm</New>
-</FormTemplates>
+<file path=customXml/itemProps1.xml><?xml version="1.0" encoding="utf-8"?>
+<ds:datastoreItem xmlns:ds="http://schemas.openxmlformats.org/officeDocument/2006/customXml" ds:itemID="{C51A9BF6-46C8-4A93-8A6C-1B6AB6A4872B}">
+  <ds:schemaRefs>
+    <ds:schemaRef ds:uri="http://schemas.microsoft.com/sharepoint/v3/contenttype/forms"/>
+  </ds:schemaRefs>
+</ds:datastoreItem>
 </file>
 
-<file path=customXml/itemProps1.xml><?xml version="1.0" encoding="utf-8"?>
+<file path=customXml/itemProps2.xml><?xml version="1.0" encoding="utf-8"?>
 <ds:datastoreItem xmlns:ds="http://schemas.openxmlformats.org/officeDocument/2006/customXml" ds:itemID="{3D367EEE-588A-43EA-B4CA-B1329416185A}">
   <ds:schemaRefs>
     <ds:schemaRef ds:uri="http://schemas.microsoft.com/office/2006/metadata/contentType"/>
@@ -30085,12 +30163,4 @@
     <ds:schemaRef ds:uri="http://schemas.microsoft.com/internal/obd"/>
   </ds:schemaRefs>
 </ds:datastoreItem>
-</file>
-
-<file path=customXml/itemProps2.xml><?xml version="1.0" encoding="utf-8"?>
-<ds:datastoreItem xmlns:ds="http://schemas.openxmlformats.org/officeDocument/2006/customXml" ds:itemID="{C51A9BF6-46C8-4A93-8A6C-1B6AB6A4872B}">
-  <ds:schemaRefs>
-    <ds:schemaRef ds:uri="http://schemas.microsoft.com/sharepoint/v3/contenttype/forms"/>
-  </ds:schemaRefs>
-</ds:datastoreItem>
 </file>